--- a/Science_Complete_Course_SagarSir/03_Biology_जीव_विज्ञान/Class_13_Nutrition_Plants_Animals.pptx
+++ b/Science_Complete_Course_SagarSir/03_Biology_जीव_विज्ञान/Class_13_Nutrition_Plants_Animals.pptx
@@ -3556,7 +3556,7 @@
               </a:defRPr>
             </a:pPr>
             <a:r>
-              <a:t>मार्गदर्शक: सागर सर (NMMS King)  |  Helpline / WhatsApp: +91 91101 13671  |  Website: sagarcoaching.tech</a:t>
+              <a:t>मार्गदर्शक: सागर सर (NMMS King)  |  Website: sagarcoaching.tech</a:t>
             </a:r>
           </a:p>
         </p:txBody>
@@ -3728,7 +3728,7 @@
               </a:defRPr>
             </a:pPr>
             <a:r>
-              <a:t>WhatsApp / Helpline: +91 91101 13671  |  वेबसाइट: sagarcoaching.tech  |  Slide 10 of 36</a:t>
+              <a:t>वेबसाइट: sagarcoaching.tech  |  Slide 10 of 36</a:t>
             </a:r>
           </a:p>
         </p:txBody>
@@ -4246,7 +4246,7 @@
               </a:defRPr>
             </a:pPr>
             <a:r>
-              <a:t>WhatsApp / Helpline: +91 91101 13671  |  वेबसाइट: sagarcoaching.tech  |  Slide 11 of 36</a:t>
+              <a:t>वेबसाइट: sagarcoaching.tech  |  Slide 11 of 36</a:t>
             </a:r>
           </a:p>
         </p:txBody>
@@ -4693,7 +4693,7 @@
               </a:defRPr>
             </a:pPr>
             <a:r>
-              <a:t>WhatsApp / Helpline: +91 91101 13671  |  वेबसाइट: sagarcoaching.tech  |  Slide 12 of 36</a:t>
+              <a:t>वेबसाइट: sagarcoaching.tech  |  Slide 12 of 36</a:t>
             </a:r>
           </a:p>
         </p:txBody>
@@ -5211,7 +5211,7 @@
               </a:defRPr>
             </a:pPr>
             <a:r>
-              <a:t>WhatsApp / Helpline: +91 91101 13671  |  वेबसाइट: sagarcoaching.tech  |  Slide 13 of 36</a:t>
+              <a:t>वेबसाइट: sagarcoaching.tech  |  Slide 13 of 36</a:t>
             </a:r>
           </a:p>
         </p:txBody>
@@ -5658,7 +5658,7 @@
               </a:defRPr>
             </a:pPr>
             <a:r>
-              <a:t>WhatsApp / Helpline: +91 91101 13671  |  वेबसाइट: sagarcoaching.tech  |  Slide 14 of 36</a:t>
+              <a:t>वेबसाइट: sagarcoaching.tech  |  Slide 14 of 36</a:t>
             </a:r>
           </a:p>
         </p:txBody>
@@ -6176,7 +6176,7 @@
               </a:defRPr>
             </a:pPr>
             <a:r>
-              <a:t>WhatsApp / Helpline: +91 91101 13671  |  वेबसाइट: sagarcoaching.tech  |  Slide 15 of 36</a:t>
+              <a:t>वेबसाइट: sagarcoaching.tech  |  Slide 15 of 36</a:t>
             </a:r>
           </a:p>
         </p:txBody>
@@ -6623,7 +6623,7 @@
               </a:defRPr>
             </a:pPr>
             <a:r>
-              <a:t>WhatsApp / Helpline: +91 91101 13671  |  वेबसाइट: sagarcoaching.tech  |  Slide 16 of 36</a:t>
+              <a:t>वेबसाइट: sagarcoaching.tech  |  Slide 16 of 36</a:t>
             </a:r>
           </a:p>
         </p:txBody>
@@ -7141,7 +7141,7 @@
               </a:defRPr>
             </a:pPr>
             <a:r>
-              <a:t>WhatsApp / Helpline: +91 91101 13671  |  वेबसाइट: sagarcoaching.tech  |  Slide 17 of 36</a:t>
+              <a:t>वेबसाइट: sagarcoaching.tech  |  Slide 17 of 36</a:t>
             </a:r>
           </a:p>
         </p:txBody>
@@ -7588,7 +7588,7 @@
               </a:defRPr>
             </a:pPr>
             <a:r>
-              <a:t>WhatsApp / Helpline: +91 91101 13671  |  वेबसाइट: sagarcoaching.tech  |  Slide 18 of 36</a:t>
+              <a:t>वेबसाइट: sagarcoaching.tech  |  Slide 18 of 36</a:t>
             </a:r>
           </a:p>
         </p:txBody>
@@ -8106,7 +8106,7 @@
               </a:defRPr>
             </a:pPr>
             <a:r>
-              <a:t>WhatsApp / Helpline: +91 91101 13671  |  वेबसाइट: sagarcoaching.tech  |  Slide 19 of 36</a:t>
+              <a:t>वेबसाइट: sagarcoaching.tech  |  Slide 19 of 36</a:t>
             </a:r>
           </a:p>
         </p:txBody>
@@ -8553,7 +8553,7 @@
               </a:defRPr>
             </a:pPr>
             <a:r>
-              <a:t>WhatsApp / Helpline: +91 91101 13671  |  वेबसाइट: sagarcoaching.tech  |  Slide 2 of 36</a:t>
+              <a:t>वेबसाइट: sagarcoaching.tech  |  Slide 2 of 36</a:t>
             </a:r>
           </a:p>
         </p:txBody>
@@ -8879,7 +8879,7 @@
               </a:defRPr>
             </a:pPr>
             <a:r>
-              <a:t>WhatsApp / Helpline: +91 91101 13671  |  वेबसाइट: sagarcoaching.tech  |  Slide 20 of 36</a:t>
+              <a:t>वेबसाइट: sagarcoaching.tech  |  Slide 20 of 36</a:t>
             </a:r>
           </a:p>
         </p:txBody>
@@ -9397,7 +9397,7 @@
               </a:defRPr>
             </a:pPr>
             <a:r>
-              <a:t>WhatsApp / Helpline: +91 91101 13671  |  वेबसाइट: sagarcoaching.tech  |  Slide 21 of 36</a:t>
+              <a:t>वेबसाइट: sagarcoaching.tech  |  Slide 21 of 36</a:t>
             </a:r>
           </a:p>
         </p:txBody>
@@ -9844,7 +9844,7 @@
               </a:defRPr>
             </a:pPr>
             <a:r>
-              <a:t>WhatsApp / Helpline: +91 91101 13671  |  वेबसाइट: sagarcoaching.tech  |  Slide 22 of 36</a:t>
+              <a:t>वेबसाइट: sagarcoaching.tech  |  Slide 22 of 36</a:t>
             </a:r>
           </a:p>
         </p:txBody>
@@ -10362,7 +10362,7 @@
               </a:defRPr>
             </a:pPr>
             <a:r>
-              <a:t>WhatsApp / Helpline: +91 91101 13671  |  वेबसाइट: sagarcoaching.tech  |  Slide 23 of 36</a:t>
+              <a:t>वेबसाइट: sagarcoaching.tech  |  Slide 23 of 36</a:t>
             </a:r>
           </a:p>
         </p:txBody>
@@ -10809,7 +10809,7 @@
               </a:defRPr>
             </a:pPr>
             <a:r>
-              <a:t>WhatsApp / Helpline: +91 91101 13671  |  वेबसाइट: sagarcoaching.tech  |  Slide 24 of 36</a:t>
+              <a:t>वेबसाइट: sagarcoaching.tech  |  Slide 24 of 36</a:t>
             </a:r>
           </a:p>
         </p:txBody>
@@ -11327,7 +11327,7 @@
               </a:defRPr>
             </a:pPr>
             <a:r>
-              <a:t>WhatsApp / Helpline: +91 91101 13671  |  वेबसाइट: sagarcoaching.tech  |  Slide 25 of 36</a:t>
+              <a:t>वेबसाइट: sagarcoaching.tech  |  Slide 25 of 36</a:t>
             </a:r>
           </a:p>
         </p:txBody>
@@ -11774,7 +11774,7 @@
               </a:defRPr>
             </a:pPr>
             <a:r>
-              <a:t>WhatsApp / Helpline: +91 91101 13671  |  वेबसाइट: sagarcoaching.tech  |  Slide 26 of 36</a:t>
+              <a:t>वेबसाइट: sagarcoaching.tech  |  Slide 26 of 36</a:t>
             </a:r>
           </a:p>
         </p:txBody>
@@ -12292,7 +12292,7 @@
               </a:defRPr>
             </a:pPr>
             <a:r>
-              <a:t>WhatsApp / Helpline: +91 91101 13671  |  वेबसाइट: sagarcoaching.tech  |  Slide 27 of 36</a:t>
+              <a:t>वेबसाइट: sagarcoaching.tech  |  Slide 27 of 36</a:t>
             </a:r>
           </a:p>
         </p:txBody>
@@ -12739,7 +12739,7 @@
               </a:defRPr>
             </a:pPr>
             <a:r>
-              <a:t>WhatsApp / Helpline: +91 91101 13671  |  वेबसाइट: sagarcoaching.tech  |  Slide 28 of 36</a:t>
+              <a:t>वेबसाइट: sagarcoaching.tech  |  Slide 28 of 36</a:t>
             </a:r>
           </a:p>
         </p:txBody>
@@ -13257,7 +13257,7 @@
               </a:defRPr>
             </a:pPr>
             <a:r>
-              <a:t>WhatsApp / Helpline: +91 91101 13671  |  वेबसाइट: sagarcoaching.tech  |  Slide 29 of 36</a:t>
+              <a:t>वेबसाइट: sagarcoaching.tech  |  Slide 29 of 36</a:t>
             </a:r>
           </a:p>
         </p:txBody>
@@ -13704,7 +13704,7 @@
               </a:defRPr>
             </a:pPr>
             <a:r>
-              <a:t>WhatsApp / Helpline: +91 91101 13671  |  वेबसाइट: sagarcoaching.tech  |  Slide 3 of 36</a:t>
+              <a:t>वेबसाइट: sagarcoaching.tech  |  Slide 3 of 36</a:t>
             </a:r>
           </a:p>
         </p:txBody>
@@ -14015,7 +14015,7 @@
               </a:defRPr>
             </a:pPr>
             <a:r>
-              <a:t>WhatsApp / Helpline: +91 91101 13671  |  वेबसाइट: sagarcoaching.tech  |  Slide 30 of 36</a:t>
+              <a:t>वेबसाइट: sagarcoaching.tech  |  Slide 30 of 36</a:t>
             </a:r>
           </a:p>
         </p:txBody>
@@ -14533,7 +14533,7 @@
               </a:defRPr>
             </a:pPr>
             <a:r>
-              <a:t>WhatsApp / Helpline: +91 91101 13671  |  वेबसाइट: sagarcoaching.tech  |  Slide 31 of 36</a:t>
+              <a:t>वेबसाइट: sagarcoaching.tech  |  Slide 31 of 36</a:t>
             </a:r>
           </a:p>
         </p:txBody>
@@ -14980,7 +14980,7 @@
               </a:defRPr>
             </a:pPr>
             <a:r>
-              <a:t>WhatsApp / Helpline: +91 91101 13671  |  वेबसाइट: sagarcoaching.tech  |  Slide 32 of 36</a:t>
+              <a:t>वेबसाइट: sagarcoaching.tech  |  Slide 32 of 36</a:t>
             </a:r>
           </a:p>
         </p:txBody>
@@ -15498,7 +15498,7 @@
               </a:defRPr>
             </a:pPr>
             <a:r>
-              <a:t>WhatsApp / Helpline: +91 91101 13671  |  वेबसाइट: sagarcoaching.tech  |  Slide 33 of 36</a:t>
+              <a:t>वेबसाइट: sagarcoaching.tech  |  Slide 33 of 36</a:t>
             </a:r>
           </a:p>
         </p:txBody>
@@ -15945,7 +15945,7 @@
               </a:defRPr>
             </a:pPr>
             <a:r>
-              <a:t>WhatsApp / Helpline: +91 91101 13671  |  वेबसाइट: sagarcoaching.tech  |  Slide 34 of 36</a:t>
+              <a:t>वेबसाइट: sagarcoaching.tech  |  Slide 34 of 36</a:t>
             </a:r>
           </a:p>
         </p:txBody>
@@ -16463,7 +16463,7 @@
               </a:defRPr>
             </a:pPr>
             <a:r>
-              <a:t>WhatsApp / Helpline: +91 91101 13671  |  वेबसाइट: sagarcoaching.tech  |  Slide 35 of 36</a:t>
+              <a:t>वेबसाइट: sagarcoaching.tech  |  Slide 35 of 36</a:t>
             </a:r>
           </a:p>
         </p:txBody>
@@ -16785,7 +16785,7 @@
               </a:defRPr>
             </a:pPr>
             <a:r>
-              <a:t>WhatsApp / Helpline: +91 91101 13671  |  वेबसाइट: sagarcoaching.tech  |  Slide 36 of 36</a:t>
+              <a:t>वेबसाइट: sagarcoaching.tech  |  Slide 36 of 36</a:t>
             </a:r>
           </a:p>
         </p:txBody>
@@ -17069,7 +17069,7 @@
               </a:defRPr>
             </a:pPr>
             <a:r>
-              <a:t>WhatsApp / Helpline: +91 91101 13671  |  वेबसाइट: sagarcoaching.tech  |  Slide 4 of 36</a:t>
+              <a:t>वेबसाइट: sagarcoaching.tech  |  Slide 4 of 36</a:t>
             </a:r>
           </a:p>
         </p:txBody>
@@ -17410,7 +17410,7 @@
               </a:defRPr>
             </a:pPr>
             <a:r>
-              <a:t>WhatsApp / Helpline: +91 91101 13671  |  वेबसाइट: sagarcoaching.tech  |  Slide 5 of 36</a:t>
+              <a:t>वेबसाइट: sagarcoaching.tech  |  Slide 5 of 36</a:t>
             </a:r>
           </a:p>
         </p:txBody>
@@ -17857,7 +17857,7 @@
               </a:defRPr>
             </a:pPr>
             <a:r>
-              <a:t>WhatsApp / Helpline: +91 91101 13671  |  वेबसाइट: sagarcoaching.tech  |  Slide 6 of 36</a:t>
+              <a:t>वेबसाइट: sagarcoaching.tech  |  Slide 6 of 36</a:t>
             </a:r>
           </a:p>
         </p:txBody>
@@ -18375,7 +18375,7 @@
               </a:defRPr>
             </a:pPr>
             <a:r>
-              <a:t>WhatsApp / Helpline: +91 91101 13671  |  वेबसाइट: sagarcoaching.tech  |  Slide 7 of 36</a:t>
+              <a:t>वेबसाइट: sagarcoaching.tech  |  Slide 7 of 36</a:t>
             </a:r>
           </a:p>
         </p:txBody>
@@ -18822,7 +18822,7 @@
               </a:defRPr>
             </a:pPr>
             <a:r>
-              <a:t>WhatsApp / Helpline: +91 91101 13671  |  वेबसाइट: sagarcoaching.tech  |  Slide 8 of 36</a:t>
+              <a:t>वेबसाइट: sagarcoaching.tech  |  Slide 8 of 36</a:t>
             </a:r>
           </a:p>
         </p:txBody>
@@ -19340,7 +19340,7 @@
               </a:defRPr>
             </a:pPr>
             <a:r>
-              <a:t>WhatsApp / Helpline: +91 91101 13671  |  वेबसाइट: sagarcoaching.tech  |  Slide 9 of 36</a:t>
+              <a:t>वेबसाइट: sagarcoaching.tech  |  Slide 9 of 36</a:t>
             </a:r>
           </a:p>
         </p:txBody>
